--- a/その他/高校対応/ゲーム数学ってなに？.pptx
+++ b/その他/高校対応/ゲーム数学ってなに？.pptx
@@ -343,7 +343,7 @@
           <a:p>
             <a:fld id="{B666B9C9-A3AA-462B-AA08-59196B1B6C77}" type="datetimeFigureOut">
               <a:rPr kumimoji="1" lang="ja-JP" altLang="en-US" smtClean="0"/>
-              <a:t>2026/5/6</a:t>
+              <a:t>2026/6/24</a:t>
             </a:fld>
             <a:endParaRPr kumimoji="1" lang="ja-JP" altLang="en-US"/>
           </a:p>
@@ -583,7 +583,7 @@
           <a:p>
             <a:fld id="{B666B9C9-A3AA-462B-AA08-59196B1B6C77}" type="datetimeFigureOut">
               <a:rPr kumimoji="1" lang="ja-JP" altLang="en-US" smtClean="0"/>
-              <a:t>2026/5/6</a:t>
+              <a:t>2026/6/24</a:t>
             </a:fld>
             <a:endParaRPr kumimoji="1" lang="ja-JP" altLang="en-US"/>
           </a:p>
@@ -871,7 +871,7 @@
           <a:p>
             <a:fld id="{B666B9C9-A3AA-462B-AA08-59196B1B6C77}" type="datetimeFigureOut">
               <a:rPr kumimoji="1" lang="ja-JP" altLang="en-US" smtClean="0"/>
-              <a:t>2026/5/6</a:t>
+              <a:t>2026/6/24</a:t>
             </a:fld>
             <a:endParaRPr kumimoji="1" lang="ja-JP" altLang="en-US"/>
           </a:p>
@@ -1073,7 +1073,7 @@
           <a:p>
             <a:fld id="{B666B9C9-A3AA-462B-AA08-59196B1B6C77}" type="datetimeFigureOut">
               <a:rPr kumimoji="1" lang="ja-JP" altLang="en-US" smtClean="0"/>
-              <a:t>2026/5/6</a:t>
+              <a:t>2026/6/24</a:t>
             </a:fld>
             <a:endParaRPr kumimoji="1" lang="ja-JP" altLang="en-US"/>
           </a:p>
@@ -1416,7 +1416,7 @@
           <a:p>
             <a:fld id="{B666B9C9-A3AA-462B-AA08-59196B1B6C77}" type="datetimeFigureOut">
               <a:rPr kumimoji="1" lang="ja-JP" altLang="en-US" smtClean="0"/>
-              <a:t>2026/5/6</a:t>
+              <a:t>2026/6/24</a:t>
             </a:fld>
             <a:endParaRPr kumimoji="1" lang="ja-JP" altLang="en-US"/>
           </a:p>
@@ -1755,7 +1755,7 @@
           <a:p>
             <a:fld id="{B666B9C9-A3AA-462B-AA08-59196B1B6C77}" type="datetimeFigureOut">
               <a:rPr kumimoji="1" lang="ja-JP" altLang="en-US" smtClean="0"/>
-              <a:t>2026/5/6</a:t>
+              <a:t>2026/6/24</a:t>
             </a:fld>
             <a:endParaRPr kumimoji="1" lang="ja-JP" altLang="en-US"/>
           </a:p>
@@ -2198,7 +2198,7 @@
           <a:p>
             <a:fld id="{B666B9C9-A3AA-462B-AA08-59196B1B6C77}" type="datetimeFigureOut">
               <a:rPr kumimoji="1" lang="ja-JP" altLang="en-US" smtClean="0"/>
-              <a:t>2026/5/6</a:t>
+              <a:t>2026/6/24</a:t>
             </a:fld>
             <a:endParaRPr kumimoji="1" lang="ja-JP" altLang="en-US"/>
           </a:p>
@@ -2316,7 +2316,7 @@
           <a:p>
             <a:fld id="{B666B9C9-A3AA-462B-AA08-59196B1B6C77}" type="datetimeFigureOut">
               <a:rPr kumimoji="1" lang="ja-JP" altLang="en-US" smtClean="0"/>
-              <a:t>2026/5/6</a:t>
+              <a:t>2026/6/24</a:t>
             </a:fld>
             <a:endParaRPr kumimoji="1" lang="ja-JP" altLang="en-US"/>
           </a:p>
@@ -2487,7 +2487,7 @@
           <a:p>
             <a:fld id="{B666B9C9-A3AA-462B-AA08-59196B1B6C77}" type="datetimeFigureOut">
               <a:rPr kumimoji="1" lang="ja-JP" altLang="en-US" smtClean="0"/>
-              <a:t>2026/5/6</a:t>
+              <a:t>2026/6/24</a:t>
             </a:fld>
             <a:endParaRPr kumimoji="1" lang="ja-JP" altLang="en-US"/>
           </a:p>
@@ -2873,7 +2873,7 @@
           <a:p>
             <a:fld id="{B666B9C9-A3AA-462B-AA08-59196B1B6C77}" type="datetimeFigureOut">
               <a:rPr kumimoji="1" lang="ja-JP" altLang="en-US" smtClean="0"/>
-              <a:t>2026/5/6</a:t>
+              <a:t>2026/6/24</a:t>
             </a:fld>
             <a:endParaRPr kumimoji="1" lang="ja-JP" altLang="en-US"/>
           </a:p>
@@ -3250,7 +3250,7 @@
           <a:p>
             <a:fld id="{B666B9C9-A3AA-462B-AA08-59196B1B6C77}" type="datetimeFigureOut">
               <a:rPr kumimoji="1" lang="ja-JP" altLang="en-US" smtClean="0"/>
-              <a:t>2026/5/6</a:t>
+              <a:t>2026/6/24</a:t>
             </a:fld>
             <a:endParaRPr kumimoji="1" lang="ja-JP" altLang="en-US"/>
           </a:p>
@@ -3569,7 +3569,7 @@
           <a:p>
             <a:fld id="{B666B9C9-A3AA-462B-AA08-59196B1B6C77}" type="datetimeFigureOut">
               <a:rPr kumimoji="1" lang="ja-JP" altLang="en-US" smtClean="0"/>
-              <a:t>2026/5/6</a:t>
+              <a:t>2026/6/24</a:t>
             </a:fld>
             <a:endParaRPr kumimoji="1" lang="ja-JP" altLang="en-US"/>
           </a:p>
@@ -4205,7 +4205,7 @@
           <a:p>
             <a:r>
               <a:rPr lang="ja-JP" altLang="en-US" dirty="0"/>
-              <a:t>数学３大要素</a:t>
+              <a:t>ゲーム数学３大要素</a:t>
             </a:r>
           </a:p>
         </p:txBody>
